--- a/dataset/guides_final/SW/guide/IT-SW-002_SW 라이선스 신청·인증 가이드.pptx
+++ b/dataset/guides_final/SW/guide/IT-SW-002_SW 라이선스 신청·인증 가이드.pptx
@@ -3247,7 +3247,7 @@
                 <a:ea typeface="Malgun Gothic"/>
                 <a:cs typeface="Malgun Gothic"/>
               </a:rPr>
-              <a:t>한화시스템 ICT 임직원 IT 안내 · SW·라이선스</a:t>
+              <a:t>가상 ICT 기업 임직원 IT 안내 · SW·라이선스</a:t>
             </a:r>
           </a:p>
         </p:txBody>
@@ -3479,7 +3479,7 @@
                 <a:ea typeface="Malgun Gothic"/>
                 <a:cs typeface="Malgun Gothic"/>
               </a:rPr>
-              <a:t>© HANWHA SYSTEMS ICT · IT-SW-002 · 사내 일반</a:t>
+              <a:t>© 가상 ICT 기업 · IT-SW-002 · 사내 일반</a:t>
             </a:r>
           </a:p>
         </p:txBody>
@@ -3727,7 +3727,7 @@
                 <a:ea typeface="Malgun Gothic"/>
                 <a:cs typeface="Malgun Gothic"/>
               </a:rPr>
-              <a:t>© HANWHA SYSTEMS ICT · IT-SW-002 · 사내 일반</a:t>
+              <a:t>© 가상 ICT 기업 · IT-SW-002 · 사내 일반</a:t>
             </a:r>
           </a:p>
         </p:txBody>
@@ -6255,7 +6255,7 @@
                 <a:ea typeface="Malgun Gothic"/>
                 <a:cs typeface="Malgun Gothic"/>
               </a:rPr>
-              <a:t>© HANWHA SYSTEMS ICT · IT-SW-002 · 사내 일반</a:t>
+              <a:t>© 가상 ICT 기업 · IT-SW-002 · 사내 일반</a:t>
             </a:r>
           </a:p>
         </p:txBody>
@@ -8200,7 +8200,7 @@
                 <a:ea typeface="Malgun Gothic"/>
                 <a:cs typeface="Malgun Gothic"/>
               </a:rPr>
-              <a:t>© HANWHA SYSTEMS ICT · IT-SW-002 · 사내 일반</a:t>
+              <a:t>© 가상 ICT 기업 · IT-SW-002 · 사내 일반</a:t>
             </a:r>
           </a:p>
         </p:txBody>
@@ -8833,7 +8833,7 @@
                 <a:ea typeface="Malgun Gothic"/>
                 <a:cs typeface="Malgun Gothic"/>
               </a:rPr>
-              <a:t>© HANWHA SYSTEMS ICT · IT-SW-002 · 사내 일반</a:t>
+              <a:t>© 가상 ICT 기업 · IT-SW-002 · 사내 일반</a:t>
             </a:r>
           </a:p>
         </p:txBody>
@@ -12250,7 +12250,7 @@
                 <a:ea typeface="Malgun Gothic"/>
                 <a:cs typeface="Malgun Gothic"/>
               </a:rPr>
-              <a:t>© HANWHA SYSTEMS ICT · IT-SW-002 · 사내 일반</a:t>
+              <a:t>© 가상 ICT 기업 · IT-SW-002 · 사내 일반</a:t>
             </a:r>
           </a:p>
         </p:txBody>
@@ -13899,7 +13899,7 @@
                 <a:ea typeface="Malgun Gothic"/>
                 <a:cs typeface="Malgun Gothic"/>
               </a:rPr>
-              <a:t>© HANWHA SYSTEMS ICT · IT-SW-002 · 사내 일반</a:t>
+              <a:t>© 가상 ICT 기업 · IT-SW-002 · 사내 일반</a:t>
             </a:r>
           </a:p>
         </p:txBody>
@@ -15193,7 +15193,7 @@
                 <a:ea typeface="Malgun Gothic"/>
                 <a:cs typeface="Malgun Gothic"/>
               </a:rPr>
-              <a:t>© HANWHA SYSTEMS ICT · IT-SW-002 · 사내 일반</a:t>
+              <a:t>© 가상 ICT 기업 · IT-SW-002 · 사내 일반</a:t>
             </a:r>
           </a:p>
         </p:txBody>
@@ -16930,7 +16930,7 @@
                 <a:ea typeface="Malgun Gothic"/>
                 <a:cs typeface="Malgun Gothic"/>
               </a:rPr>
-              <a:t>© HANWHA SYSTEMS ICT · IT-SW-002 · 사내 일반</a:t>
+              <a:t>© 가상 ICT 기업 · IT-SW-002 · 사내 일반</a:t>
             </a:r>
           </a:p>
         </p:txBody>
@@ -18036,7 +18036,7 @@
                 <a:ea typeface="Malgun Gothic"/>
                 <a:cs typeface="Malgun Gothic"/>
               </a:rPr>
-              <a:t>© HANWHA SYSTEMS ICT · IT-SW-002 · 사내 일반</a:t>
+              <a:t>© 가상 ICT 기업 · IT-SW-002 · 사내 일반</a:t>
             </a:r>
           </a:p>
         </p:txBody>
@@ -20009,7 +20009,7 @@
                 <a:ea typeface="Malgun Gothic"/>
                 <a:cs typeface="Malgun Gothic"/>
               </a:rPr>
-              <a:t>© HANWHA SYSTEMS ICT · IT-SW-002 · 사내 일반</a:t>
+              <a:t>© 가상 ICT 기업 · IT-SW-002 · 사내 일반</a:t>
             </a:r>
           </a:p>
         </p:txBody>
@@ -21814,7 +21814,7 @@
                 <a:ea typeface="Malgun Gothic"/>
                 <a:cs typeface="Malgun Gothic"/>
               </a:rPr>
-              <a:t>© HANWHA SYSTEMS ICT · IT-SW-002 · 사내 일반</a:t>
+              <a:t>© 가상 ICT 기업 · IT-SW-002 · 사내 일반</a:t>
             </a:r>
           </a:p>
         </p:txBody>
@@ -24184,7 +24184,7 @@
                 <a:ea typeface="Malgun Gothic"/>
                 <a:cs typeface="Malgun Gothic"/>
               </a:rPr>
-              <a:t>© HANWHA SYSTEMS ICT · IT-SW-002 · 사내 일반</a:t>
+              <a:t>© 가상 ICT 기업 · IT-SW-002 · 사내 일반</a:t>
             </a:r>
           </a:p>
         </p:txBody>
@@ -25645,7 +25645,7 @@
                 <a:ea typeface="Malgun Gothic"/>
                 <a:cs typeface="Malgun Gothic"/>
               </a:rPr>
-              <a:t>© HANWHA SYSTEMS ICT · IT-SW-002 · 사내 일반</a:t>
+              <a:t>© 가상 ICT 기업 · IT-SW-002 · 사내 일반</a:t>
             </a:r>
           </a:p>
         </p:txBody>
@@ -26727,7 +26727,7 @@
                 <a:ea typeface="Malgun Gothic"/>
                 <a:cs typeface="Malgun Gothic"/>
               </a:rPr>
-              <a:t>© HANWHA SYSTEMS ICT · IT-SW-002 · 사내 일반</a:t>
+              <a:t>© 가상 ICT 기업 · IT-SW-002 · 사내 일반</a:t>
             </a:r>
           </a:p>
         </p:txBody>
@@ -28994,7 +28994,7 @@
                 <a:ea typeface="Malgun Gothic"/>
                 <a:cs typeface="Malgun Gothic"/>
               </a:rPr>
-              <a:t>© HANWHA SYSTEMS ICT · IT-SW-002 · 사내 일반</a:t>
+              <a:t>© 가상 ICT 기업 · IT-SW-002 · 사내 일반</a:t>
             </a:r>
           </a:p>
         </p:txBody>
@@ -30620,7 +30620,7 @@
                 <a:ea typeface="Malgun Gothic"/>
                 <a:cs typeface="Malgun Gothic"/>
               </a:rPr>
-              <a:t>© HANWHA SYSTEMS ICT · IT-SW-002 · 사내 일반</a:t>
+              <a:t>© 가상 ICT 기업 · IT-SW-002 · 사내 일반</a:t>
             </a:r>
           </a:p>
         </p:txBody>
@@ -32802,7 +32802,7 @@
                 <a:ea typeface="Malgun Gothic"/>
                 <a:cs typeface="Malgun Gothic"/>
               </a:rPr>
-              <a:t>© HANWHA SYSTEMS ICT · IT-SW-002 · 사내 일반</a:t>
+              <a:t>© 가상 ICT 기업 · IT-SW-002 · 사내 일반</a:t>
             </a:r>
           </a:p>
         </p:txBody>
@@ -33050,7 +33050,7 @@
                 <a:ea typeface="Malgun Gothic"/>
                 <a:cs typeface="Malgun Gothic"/>
               </a:rPr>
-              <a:t>© HANWHA SYSTEMS ICT · IT-SW-002 · 사내 일반</a:t>
+              <a:t>© 가상 ICT 기업 · IT-SW-002 · 사내 일반</a:t>
             </a:r>
           </a:p>
         </p:txBody>
@@ -33831,7 +33831,7 @@
                 <a:ea typeface="Malgun Gothic"/>
                 <a:cs typeface="Malgun Gothic"/>
               </a:rPr>
-              <a:t>© HANWHA SYSTEMS ICT · IT-SW-002 · 사내 일반</a:t>
+              <a:t>© 가상 ICT 기업 · IT-SW-002 · 사내 일반</a:t>
             </a:r>
           </a:p>
         </p:txBody>
@@ -34079,7 +34079,7 @@
                 <a:ea typeface="Malgun Gothic"/>
                 <a:cs typeface="Malgun Gothic"/>
               </a:rPr>
-              <a:t>© HANWHA SYSTEMS ICT · IT-SW-002 · 사내 일반</a:t>
+              <a:t>© 가상 ICT 기업 · IT-SW-002 · 사내 일반</a:t>
             </a:r>
           </a:p>
         </p:txBody>
@@ -34806,7 +34806,7 @@
                 <a:ea typeface="Malgun Gothic"/>
                 <a:cs typeface="Malgun Gothic"/>
               </a:rPr>
-              <a:t>© HANWHA SYSTEMS ICT · IT-SW-002 · 사내 일반</a:t>
+              <a:t>© 가상 ICT 기업 · IT-SW-002 · 사내 일반</a:t>
             </a:r>
           </a:p>
         </p:txBody>
@@ -36082,7 +36082,7 @@
                 <a:ea typeface="Malgun Gothic"/>
                 <a:cs typeface="Malgun Gothic"/>
               </a:rPr>
-              <a:t>© HANWHA SYSTEMS ICT · IT-SW-002 · 사내 일반</a:t>
+              <a:t>© 가상 ICT 기업 · IT-SW-002 · 사내 일반</a:t>
             </a:r>
           </a:p>
         </p:txBody>
@@ -36330,7 +36330,7 @@
                 <a:ea typeface="Malgun Gothic"/>
                 <a:cs typeface="Malgun Gothic"/>
               </a:rPr>
-              <a:t>© HANWHA SYSTEMS ICT · IT-SW-002 · 사내 일반</a:t>
+              <a:t>© 가상 ICT 기업 · IT-SW-002 · 사내 일반</a:t>
             </a:r>
           </a:p>
         </p:txBody>
@@ -36842,7 +36842,7 @@
                           <a:ea typeface="Malgun Gothic"/>
                           <a:cs typeface="Malgun Gothic"/>
                         </a:rPr>
-                        <a:t>사내 IT 포털(hanwha-admin) 상단 [챗봇 문의]</a:t>
+                        <a:t>사내 IT 포털 상단 [챗봇 문의]</a:t>
                       </a:r>
                     </a:p>
                   </a:txBody>
@@ -37534,7 +37534,7 @@
                           <a:ea typeface="Malgun Gothic"/>
                           <a:cs typeface="Malgun Gothic"/>
                         </a:rPr>
-                        <a:t>it-helpdesk@hanwha-ict.example</a:t>
+                        <a:t>it-helpdesk@ict.example</a:t>
                       </a:r>
                     </a:p>
                   </a:txBody>
@@ -37833,7 +37833,7 @@
                 <a:ea typeface="Malgun Gothic"/>
                 <a:cs typeface="Malgun Gothic"/>
               </a:rPr>
-              <a:t>© HANWHA SYSTEMS ICT · IT-SW-002 · 사내 일반</a:t>
+              <a:t>© 가상 ICT 기업 · IT-SW-002 · 사내 일반</a:t>
             </a:r>
           </a:p>
         </p:txBody>
@@ -38081,7 +38081,7 @@
                 <a:ea typeface="Malgun Gothic"/>
                 <a:cs typeface="Malgun Gothic"/>
               </a:rPr>
-              <a:t>© HANWHA SYSTEMS ICT · IT-SW-002 · 사내 일반</a:t>
+              <a:t>© 가상 ICT 기업 · IT-SW-002 · 사내 일반</a:t>
             </a:r>
           </a:p>
         </p:txBody>
@@ -39605,7 +39605,7 @@
                           <a:ea typeface="Malgun Gothic"/>
                           <a:cs typeface="Malgun Gothic"/>
                         </a:rPr>
-                        <a:t>사내 IT 포털 (hanwha-admin)</a:t>
+                        <a:t>사내 IT 포털</a:t>
                       </a:r>
                     </a:p>
                   </a:txBody>
@@ -40073,7 +40073,7 @@
                 <a:ea typeface="Malgun Gothic"/>
                 <a:cs typeface="Malgun Gothic"/>
               </a:rPr>
-              <a:t>© HANWHA SYSTEMS ICT · IT-SW-002 · 사내 일반</a:t>
+              <a:t>© 가상 ICT 기업 · IT-SW-002 · 사내 일반</a:t>
             </a:r>
           </a:p>
         </p:txBody>
@@ -41050,7 +41050,7 @@
                 <a:ea typeface="Malgun Gothic"/>
                 <a:cs typeface="Malgun Gothic"/>
               </a:rPr>
-              <a:t>© HANWHA SYSTEMS ICT · IT-SW-002 · 사내 일반</a:t>
+              <a:t>© 가상 ICT 기업 · IT-SW-002 · 사내 일반</a:t>
             </a:r>
           </a:p>
         </p:txBody>
@@ -41298,7 +41298,7 @@
                 <a:ea typeface="Malgun Gothic"/>
                 <a:cs typeface="Malgun Gothic"/>
               </a:rPr>
-              <a:t>© HANWHA SYSTEMS ICT · IT-SW-002 · 사내 일반</a:t>
+              <a:t>© 가상 ICT 기업 · IT-SW-002 · 사내 일반</a:t>
             </a:r>
           </a:p>
         </p:txBody>
@@ -42499,7 +42499,7 @@
                 <a:ea typeface="Malgun Gothic"/>
                 <a:cs typeface="Malgun Gothic"/>
               </a:rPr>
-              <a:t>사내 IT 포털(hanwha-admin) &gt; 소프트웨어 센터,</a:t>
+              <a:t>사내 IT 포털 &gt; 소프트웨어 센터, IT 요청, 내 요청</a:t>
             </a:r>
           </a:p>
           <a:p>
@@ -42523,7 +42523,7 @@
                 <a:ea typeface="Malgun Gothic"/>
                 <a:cs typeface="Malgun Gothic"/>
               </a:rPr>
-              <a:t>IT 요청, 내 요청 현황</a:t>
+              <a:t>현황</a:t>
             </a:r>
           </a:p>
         </p:txBody>
@@ -42664,7 +42664,7 @@
                 <a:ea typeface="Malgun Gothic"/>
                 <a:cs typeface="Malgun Gothic"/>
               </a:rPr>
-              <a:t>© HANWHA SYSTEMS ICT · IT-SW-002 · 사내 일반</a:t>
+              <a:t>© 가상 ICT 기업 · IT-SW-002 · 사내 일반</a:t>
             </a:r>
           </a:p>
         </p:txBody>
@@ -42912,7 +42912,7 @@
                 <a:ea typeface="Malgun Gothic"/>
                 <a:cs typeface="Malgun Gothic"/>
               </a:rPr>
-              <a:t>© HANWHA SYSTEMS ICT · IT-SW-002 · 사내 일반</a:t>
+              <a:t>© 가상 ICT 기업 · IT-SW-002 · 사내 일반</a:t>
             </a:r>
           </a:p>
         </p:txBody>
@@ -43828,7 +43828,7 @@
                 <a:ea typeface="Malgun Gothic"/>
                 <a:cs typeface="Malgun Gothic"/>
               </a:rPr>
-              <a:t>© HANWHA SYSTEMS ICT · IT-SW-002 · 사내 일반</a:t>
+              <a:t>© 가상 ICT 기업 · IT-SW-002 · 사내 일반</a:t>
             </a:r>
           </a:p>
         </p:txBody>
@@ -45944,7 +45944,7 @@
                 <a:ea typeface="Malgun Gothic"/>
                 <a:cs typeface="Malgun Gothic"/>
               </a:rPr>
-              <a:t>© HANWHA SYSTEMS ICT · IT-SW-002 · 사내 일반</a:t>
+              <a:t>© 가상 ICT 기업 · IT-SW-002 · 사내 일반</a:t>
             </a:r>
           </a:p>
         </p:txBody>
@@ -47637,7 +47637,7 @@
                 <a:ea typeface="Malgun Gothic"/>
                 <a:cs typeface="Malgun Gothic"/>
               </a:rPr>
-              <a:t>© HANWHA SYSTEMS ICT · IT-SW-002 · 사내 일반</a:t>
+              <a:t>© 가상 ICT 기업 · IT-SW-002 · 사내 일반</a:t>
             </a:r>
           </a:p>
         </p:txBody>
